--- a/test-corpus/word-verification/venn.pptx
+++ b/test-corpus/word-verification/venn.pptx
@@ -144,7 +144,7 @@
         </p:nvSpPr>
         <p:spPr>
           <a:xfrm>
-            <a:off x="3510798" y="1028700"/>
+            <a:off x="1389390" y="1028700"/>
             <a:ext cx="5170404" cy="426665"/>
           </a:xfrm>
           <a:prstGeom prst="rect">
@@ -186,7 +186,7 @@
         </p:nvSpPr>
         <p:spPr>
           <a:xfrm>
-            <a:off x="4835399" y="1940212"/>
+            <a:off x="2713991" y="1940212"/>
             <a:ext cx="2521202" cy="2521202"/>
           </a:xfrm>
           <a:prstGeom prst="ellipse">
@@ -212,7 +212,7 @@
         </p:nvSpPr>
         <p:spPr>
           <a:xfrm>
-            <a:off x="3995645" y="3394751"/>
+            <a:off x="1874237" y="3394751"/>
             <a:ext cx="2521202" cy="2521202"/>
           </a:xfrm>
           <a:prstGeom prst="ellipse">
@@ -238,7 +238,7 @@
         </p:nvSpPr>
         <p:spPr>
           <a:xfrm>
-            <a:off x="5675153" y="3394751"/>
+            <a:off x="3553745" y="3394751"/>
             <a:ext cx="2521202" cy="2521202"/>
           </a:xfrm>
           <a:prstGeom prst="ellipse">
@@ -264,7 +264,7 @@
         </p:nvSpPr>
         <p:spPr>
           <a:xfrm>
-            <a:off x="5824001" y="2420210"/>
+            <a:off x="3702593" y="2420210"/>
             <a:ext cx="543998" cy="174545"/>
           </a:xfrm>
           <a:prstGeom prst="rect">
@@ -306,7 +306,7 @@
         </p:nvSpPr>
         <p:spPr>
           <a:xfrm>
-            <a:off x="4459445" y="4914753"/>
+            <a:off x="2338037" y="4914753"/>
             <a:ext cx="392726" cy="174545"/>
           </a:xfrm>
           <a:prstGeom prst="rect">
@@ -348,7 +348,7 @@
         </p:nvSpPr>
         <p:spPr>
           <a:xfrm>
-            <a:off x="7226375" y="4914753"/>
+            <a:off x="5104967" y="4914753"/>
             <a:ext cx="619634" cy="174545"/>
           </a:xfrm>
           <a:prstGeom prst="rect">
@@ -390,7 +390,7 @@
         </p:nvSpPr>
         <p:spPr>
           <a:xfrm>
-            <a:off x="4968774" y="3692928"/>
+            <a:off x="2847366" y="3692928"/>
             <a:ext cx="868845" cy="155151"/>
           </a:xfrm>
           <a:prstGeom prst="rect">
@@ -432,7 +432,7 @@
         </p:nvSpPr>
         <p:spPr>
           <a:xfrm>
-            <a:off x="5626669" y="4892928"/>
+            <a:off x="3505261" y="4892928"/>
             <a:ext cx="938663" cy="155151"/>
           </a:xfrm>
           <a:prstGeom prst="rect">
@@ -474,7 +474,7 @@
         </p:nvSpPr>
         <p:spPr>
           <a:xfrm>
-            <a:off x="6249654" y="3692928"/>
+            <a:off x="4128246" y="3692928"/>
             <a:ext cx="1078299" cy="155151"/>
           </a:xfrm>
           <a:prstGeom prst="rect">
@@ -516,7 +516,7 @@
         </p:nvSpPr>
         <p:spPr>
           <a:xfrm>
-            <a:off x="5754668" y="4092930"/>
+            <a:off x="3633260" y="4092930"/>
             <a:ext cx="682664" cy="155151"/>
           </a:xfrm>
           <a:prstGeom prst="rect">
@@ -546,6 +546,205 @@
                 </a:solidFill>
               </a:rPr>
               <a:t>All three</a:t>
+            </a:r>
+          </a:p>
+        </p:txBody>
+      </p:sp>
+      <p:sp>
+        <p:nvSpPr>
+          <p:cNvPr id="4" name="Mermaid source"/>
+          <p:cNvSpPr/>
+          <p:nvPr/>
+        </p:nvSpPr>
+        <p:spPr>
+          <a:xfrm>
+            <a:off x="7674864" y="1028700"/>
+            <a:ext cx="4059936" cy="5372100"/>
+          </a:xfrm>
+          <a:prstGeom prst="rect">
+            <a:avLst/>
+          </a:prstGeom>
+          <a:solidFill>
+            <a:srgbClr val="F3F4F6"/>
+          </a:solidFill>
+          <a:ln w="9525">
+            <a:solidFill>
+              <a:srgbClr val="D1D5DB"/>
+            </a:solidFill>
+          </a:ln>
+        </p:spPr>
+        <p:txBody>
+          <a:bodyPr wrap="square" lIns="91440" tIns="45720" rIns="91440" bIns="45720" anchor="t">
+            <a:noAutofit/>
+          </a:bodyPr>
+          <a:lstStyle/>
+          <a:p>
+            <a:pPr algn="l"/>
+            <a:r>
+              <a:rPr lang="en-US" sz="1400" dirty="0">
+                <a:solidFill>
+                  <a:srgbClr val="1F2937"/>
+                </a:solidFill>
+                <a:latin typeface="Consolas"/>
+                <a:cs typeface="Consolas"/>
+              </a:rPr>
+              <a:t>venn-beta</a:t>
+            </a:r>
+          </a:p>
+          <a:p>
+            <a:pPr algn="l"/>
+            <a:r>
+              <a:rPr lang="en-US" sz="1400" dirty="0">
+                <a:solidFill>
+                  <a:srgbClr val="1F2937"/>
+                </a:solidFill>
+                <a:latin typeface="Consolas"/>
+                <a:cs typeface="Consolas"/>
+              </a:rPr>
+              <a:t>  title Skills coverage</a:t>
+            </a:r>
+          </a:p>
+          <a:p>
+            <a:pPr algn="l"/>
+            <a:r>
+              <a:rPr lang="en-US" sz="1400" dirty="0">
+                <a:solidFill>
+                  <a:srgbClr val="1F2937"/>
+                </a:solidFill>
+                <a:latin typeface="Consolas"/>
+                <a:cs typeface="Consolas"/>
+              </a:rPr>
+              <a:t>  set A ["Design"]</a:t>
+            </a:r>
+          </a:p>
+          <a:p>
+            <a:pPr algn="l"/>
+            <a:r>
+              <a:rPr lang="en-US" sz="1400" dirty="0">
+                <a:solidFill>
+                  <a:srgbClr val="1F2937"/>
+                </a:solidFill>
+                <a:latin typeface="Consolas"/>
+                <a:cs typeface="Consolas"/>
+              </a:rPr>
+              <a:t>  set B ["Code"]</a:t>
+            </a:r>
+          </a:p>
+          <a:p>
+            <a:pPr algn="l"/>
+            <a:r>
+              <a:rPr lang="en-US" sz="1400" dirty="0">
+                <a:solidFill>
+                  <a:srgbClr val="1F2937"/>
+                </a:solidFill>
+                <a:latin typeface="Consolas"/>
+                <a:cs typeface="Consolas"/>
+              </a:rPr>
+              <a:t>  set C ["Writing"]</a:t>
+            </a:r>
+          </a:p>
+          <a:p>
+            <a:pPr algn="l"/>
+            <a:r>
+              <a:rPr lang="en-US" sz="1400" dirty="0">
+                <a:solidFill>
+                  <a:srgbClr val="1F2937"/>
+                </a:solidFill>
+                <a:latin typeface="Consolas"/>
+                <a:cs typeface="Consolas"/>
+              </a:rPr>
+              <a:t>  union A,B</a:t>
+            </a:r>
+          </a:p>
+          <a:p>
+            <a:pPr algn="l"/>
+            <a:r>
+              <a:rPr lang="en-US" sz="1400" dirty="0">
+                <a:solidFill>
+                  <a:srgbClr val="1F2937"/>
+                </a:solidFill>
+                <a:latin typeface="Consolas"/>
+                <a:cs typeface="Consolas"/>
+              </a:rPr>
+              <a:t>    text ["Design+Code"]</a:t>
+            </a:r>
+          </a:p>
+          <a:p>
+            <a:pPr algn="l"/>
+            <a:r>
+              <a:rPr lang="en-US" sz="1400" dirty="0">
+                <a:solidFill>
+                  <a:srgbClr val="1F2937"/>
+                </a:solidFill>
+                <a:latin typeface="Consolas"/>
+                <a:cs typeface="Consolas"/>
+              </a:rPr>
+              <a:t>  union B,C</a:t>
+            </a:r>
+          </a:p>
+          <a:p>
+            <a:pPr algn="l"/>
+            <a:r>
+              <a:rPr lang="en-US" sz="1400" dirty="0">
+                <a:solidFill>
+                  <a:srgbClr val="1F2937"/>
+                </a:solidFill>
+                <a:latin typeface="Consolas"/>
+                <a:cs typeface="Consolas"/>
+              </a:rPr>
+              <a:t>    text ["Code+Writing"]</a:t>
+            </a:r>
+          </a:p>
+          <a:p>
+            <a:pPr algn="l"/>
+            <a:r>
+              <a:rPr lang="en-US" sz="1400" dirty="0">
+                <a:solidFill>
+                  <a:srgbClr val="1F2937"/>
+                </a:solidFill>
+                <a:latin typeface="Consolas"/>
+                <a:cs typeface="Consolas"/>
+              </a:rPr>
+              <a:t>  union A,C</a:t>
+            </a:r>
+          </a:p>
+          <a:p>
+            <a:pPr algn="l"/>
+            <a:r>
+              <a:rPr lang="en-US" sz="1400" dirty="0">
+                <a:solidFill>
+                  <a:srgbClr val="1F2937"/>
+                </a:solidFill>
+                <a:latin typeface="Consolas"/>
+                <a:cs typeface="Consolas"/>
+              </a:rPr>
+              <a:t>    text ["Design+Writing"]</a:t>
+            </a:r>
+          </a:p>
+          <a:p>
+            <a:pPr algn="l"/>
+            <a:r>
+              <a:rPr lang="en-US" sz="1400" dirty="0">
+                <a:solidFill>
+                  <a:srgbClr val="1F2937"/>
+                </a:solidFill>
+                <a:latin typeface="Consolas"/>
+                <a:cs typeface="Consolas"/>
+              </a:rPr>
+              <a:t>  union A,B,C</a:t>
+            </a:r>
+          </a:p>
+          <a:p>
+            <a:pPr algn="l"/>
+            <a:r>
+              <a:rPr lang="en-US" sz="1400" dirty="0">
+                <a:solidFill>
+                  <a:srgbClr val="1F2937"/>
+                </a:solidFill>
+                <a:latin typeface="Consolas"/>
+                <a:cs typeface="Consolas"/>
+              </a:rPr>
+              <a:t>    text ["All three"]</a:t>
             </a:r>
           </a:p>
         </p:txBody>
